--- a/formats/AstroMark/research/AstroMark-Research.pptx
+++ b/formats/AstroMark/research/AstroMark-Research.pptx
@@ -11534,7 +11534,7 @@
                 </a:solidFill>
                 <a:latin typeface="Helvetica Neue"/>
               </a:rPr>
-              <a:t>ink 3.65%  ·  ink per statement 0.182  ·  occlusion 10.95%  ·  20 statements expressed</a:t>
+              <a:t>ink 3.65%  ·  ink per statement 0.183  ·  occlusion 11.06%  ·  20 statements expressed</a:t>
             </a:r>
           </a:p>
         </p:txBody>
@@ -11818,7 +11818,7 @@
                 </a:solidFill>
                 <a:latin typeface="Helvetica Neue"/>
               </a:rPr>
-              <a:t>ink 3.16%  ·  ink per statement 0.158  ·  occlusion 11.12%  ·  20 statements expressed</a:t>
+              <a:t>ink 3.17%  ·  ink per statement 0.159  ·  occlusion 11.24%  ·  20 statements expressed</a:t>
             </a:r>
           </a:p>
         </p:txBody>
@@ -12102,7 +12102,7 @@
                 </a:solidFill>
                 <a:latin typeface="Helvetica Neue"/>
               </a:rPr>
-              <a:t>ink 3.36%  ·  ink per statement 0.168  ·  occlusion 11.59%  ·  20 statements expressed</a:t>
+              <a:t>ink 3.36%  ·  ink per statement 0.168  ·  occlusion 11.67%  ·  20 statements expressed</a:t>
             </a:r>
           </a:p>
         </p:txBody>
@@ -12386,7 +12386,7 @@
                 </a:solidFill>
                 <a:latin typeface="Helvetica Neue"/>
               </a:rPr>
-              <a:t>ink 2.66%  ·  ink per statement 0.133  ·  occlusion 11.35%  ·  20 statements expressed</a:t>
+              <a:t>ink 2.66%  ·  ink per statement 0.133  ·  occlusion 11.43%  ·  20 statements expressed</a:t>
             </a:r>
           </a:p>
         </p:txBody>
@@ -12913,7 +12913,7 @@
                           </a:solidFill>
                           <a:latin typeface="Helvetica Neue"/>
                         </a:rPr>
-                        <a:t>11.35%</a:t>
+                        <a:t>11.43%</a:t>
                       </a:r>
                     </a:p>
                   </a:txBody>
@@ -12981,7 +12981,7 @@
                           </a:solidFill>
                           <a:latin typeface="Helvetica Neue"/>
                         </a:rPr>
-                        <a:t>3.16%</a:t>
+                        <a:t>3.17%</a:t>
                       </a:r>
                     </a:p>
                   </a:txBody>
@@ -13003,7 +13003,7 @@
                           </a:solidFill>
                           <a:latin typeface="Helvetica Neue"/>
                         </a:rPr>
-                        <a:t>0.158</a:t>
+                        <a:t>0.159</a:t>
                       </a:r>
                     </a:p>
                   </a:txBody>
@@ -13025,7 +13025,7 @@
                           </a:solidFill>
                           <a:latin typeface="Helvetica Neue"/>
                         </a:rPr>
-                        <a:t>11.12%</a:t>
+                        <a:t>11.24%</a:t>
                       </a:r>
                     </a:p>
                   </a:txBody>
@@ -13137,7 +13137,7 @@
                           </a:solidFill>
                           <a:latin typeface="Helvetica Neue"/>
                         </a:rPr>
-                        <a:t>11.59%</a:t>
+                        <a:t>11.67%</a:t>
                       </a:r>
                     </a:p>
                   </a:txBody>
@@ -13227,7 +13227,7 @@
                           </a:solidFill>
                           <a:latin typeface="Helvetica Neue"/>
                         </a:rPr>
-                        <a:t>0.182</a:t>
+                        <a:t>0.183</a:t>
                       </a:r>
                     </a:p>
                   </a:txBody>
@@ -13249,7 +13249,7 @@
                           </a:solidFill>
                           <a:latin typeface="Helvetica Neue"/>
                         </a:rPr>
-                        <a:t>10.95%</a:t>
+                        <a:t>11.06%</a:t>
                       </a:r>
                     </a:p>
                   </a:txBody>
